--- a/slides/build/aula-03-autenticacao.pptx
+++ b/slides/build/aula-03-autenticacao.pptx
@@ -4420,7 +4420,7 @@
                 <a:cs typeface="Open Sans Extra Bold"/>
                 <a:sym typeface="Open Sans Extra Bold"/>
               </a:rPr>
-              <a:t>Ela atravessa uma pilha de camadas — o middleware.</a:t>
+              <a:t>Ela atravessa uma pilha de camadas: o middleware.</a:t>
             </a:r>
           </a:p>
           <a:p>
@@ -7119,7 +7119,7 @@
                 <a:cs typeface="Open Sans Extra Bold"/>
                 <a:sym typeface="Open Sans Extra Bold"/>
               </a:rPr>
-              <a:t>Entender JWT de verdade — e o que ele não é.</a:t>
+              <a:t>Entender JWT de verdade: e o que ele não é.</a:t>
             </a:r>
           </a:p>
           <a:p>
@@ -8086,7 +8086,7 @@
                 <a:cs typeface="Open Sans Extra Bold"/>
                 <a:sym typeface="Open Sans Extra Bold"/>
               </a:rPr>
-              <a:t>Logout é apagar — imediato</a:t>
+              <a:t>Logout é apagar: imediato</a:t>
             </a:r>
           </a:p>
           <a:p>
@@ -10973,7 +10973,7 @@
                 <a:cs typeface="Open Sans Extra Bold"/>
                 <a:sym typeface="Open Sans Extra Bold"/>
               </a:rPr>
-              <a:t>Quem manda é o navegador — o app nativo não participa disso.</a:t>
+              <a:t>Quem manda é o navegador: o app nativo não participa disso.</a:t>
             </a:r>
           </a:p>
           <a:p>
@@ -12144,7 +12144,7 @@
                 <a:cs typeface="Open Sans Extra Bold"/>
                 <a:sym typeface="Open Sans Extra Bold"/>
               </a:rPr>
-              <a:t>401 Unauthorized — não sabemos quem é você.</a:t>
+              <a:t>401 Unauthorized: não sabemos quem é você.</a:t>
             </a:r>
           </a:p>
           <a:p>
@@ -12186,7 +12186,7 @@
                 <a:cs typeface="Open Sans Extra Bold"/>
                 <a:sym typeface="Open Sans Extra Bold"/>
               </a:rPr>
-              <a:t>403 Forbidden — sabemos quem é você, e você não pode.</a:t>
+              <a:t>403 Forbidden: sabemos quem é você, e você não pode.</a:t>
             </a:r>
           </a:p>
           <a:p>
@@ -13174,7 +13174,7 @@
                 <a:cs typeface="Open Sans Extra Bold"/>
                 <a:sym typeface="Open Sans Extra Bold"/>
               </a:rPr>
-              <a:t>b) Denylist por jti — revoga aquele token.</a:t>
+              <a:t>b) Denylist por jti: revoga aquele token.</a:t>
             </a:r>
           </a:p>
           <a:p>
@@ -13195,7 +13195,7 @@
                 <a:cs typeface="Open Sans Extra Bold"/>
                 <a:sym typeface="Open Sans Extra Bold"/>
               </a:rPr>
-              <a:t>c) token_version — derruba todos os tokens do usuário.</a:t>
+              <a:t>c) token_version: derruba todos os tokens do usuário.</a:t>
             </a:r>
           </a:p>
           <a:p>
@@ -14044,7 +14044,7 @@
                 <a:cs typeface="Open Sans Extra Bold"/>
                 <a:sym typeface="Open Sans Extra Bold"/>
               </a:rPr>
-              <a:t>Logout no celular não derruba o notebook — e é o certo.</a:t>
+              <a:t>Logout no celular não derruba o notebook. E é o certo.</a:t>
             </a:r>
           </a:p>
         </p:txBody>
@@ -17687,7 +17687,7 @@
                 <a:cs typeface="Open Sans Extra Bold"/>
                 <a:sym typeface="Open Sans Extra Bold"/>
               </a:rPr>
-              <a:t>bin/rubocop — estilo. O black/ruff do Ruby.</a:t>
+              <a:t>bin/rubocop: estilo. O black/ruff do Ruby.</a:t>
             </a:r>
           </a:p>
           <a:p>
@@ -17708,7 +17708,7 @@
                 <a:cs typeface="Open Sans Extra Bold"/>
                 <a:sym typeface="Open Sans Extra Bold"/>
               </a:rPr>
-              <a:t>bin/brakeman — análise estática de segurança.</a:t>
+              <a:t>bin/brakeman: análise estática de segurança.</a:t>
             </a:r>
           </a:p>
           <a:p>
@@ -17729,7 +17729,7 @@
                 <a:cs typeface="Open Sans Extra Bold"/>
                 <a:sym typeface="Open Sans Extra Bold"/>
               </a:rPr>
-              <a:t>bundler-audit — gems com CVE conhecido.</a:t>
+              <a:t>bundler-audit: gems com CVE conhecido.</a:t>
             </a:r>
           </a:p>
           <a:p>
@@ -17986,7 +17986,7 @@
                 <a:cs typeface="Open Sans Extra Bold"/>
                 <a:sym typeface="Open Sans Extra Bold"/>
               </a:rPr>
-              <a:t>O app nativo NÃO passa por CORS — é regra de navegador.</a:t>
+              <a:t>O app nativo NÃO passa por CORS. É regra de navegador.</a:t>
             </a:r>
           </a:p>
           <a:p>
@@ -18521,7 +18521,7 @@
                 <a:cs typeface="Open Sans Extra Bold"/>
                 <a:sym typeface="Open Sans Extra Bold"/>
               </a:rPr>
-              <a:t>Serializer é a lista de convidados — sem ele o digest vaza.</a:t>
+              <a:t>Serializer é a lista de convidados. Sem ele o digest vaza.</a:t>
             </a:r>
           </a:p>
           <a:p>
@@ -19915,7 +19915,7 @@
                 <a:cs typeface="Open Sans Extra Bold"/>
                 <a:sym typeface="Open Sans Extra Bold"/>
               </a:rPr>
-              <a:t>code é estável — o cliente decide o que fazer com base nele.</a:t>
+              <a:t>code é estável: o cliente decide o que fazer com base nele.</a:t>
             </a:r>
           </a:p>
           <a:p>

--- a/slides/build/aula-03-autenticacao.pptx
+++ b/slides/build/aula-03-autenticacao.pptx
@@ -6788,7 +6788,7 @@
                 <a:cs typeface="Open Sans Extra Bold"/>
                 <a:sym typeface="Open Sans Extra Bold"/>
               </a:rPr>
-              <a:t>PRÁTICA 1 — TRAGA O CÓDIGO E LEIA</a:t>
+              <a:t>PRÁTICA 1: TRAGA O CÓDIGO E LEIA</a:t>
             </a:r>
           </a:p>
         </p:txBody>
@@ -8168,7 +8168,7 @@
                 <a:cs typeface="Open Sans Extra Bold"/>
                 <a:sym typeface="Open Sans Extra Bold"/>
               </a:rPr>
-              <a:t>PRÁTICA 2 — CADASTRO NO TERMINAL</a:t>
+              <a:t>PRÁTICA 2: CADASTRO NO TERMINAL</a:t>
             </a:r>
           </a:p>
         </p:txBody>
@@ -9568,7 +9568,7 @@
                 <a:cs typeface="Open Sans Extra Bold"/>
                 <a:sym typeface="Open Sans Extra Bold"/>
               </a:rPr>
-              <a:t>PRÁTICA 3 — O E-MAIL E A CONFIRMAÇÃO</a:t>
+              <a:t>PRÁTICA 3: O E-MAIL E A CONFIRMAÇÃO</a:t>
             </a:r>
           </a:p>
         </p:txBody>
@@ -15225,7 +15225,7 @@
                 <a:cs typeface="Open Sans Extra Bold"/>
                 <a:sym typeface="Open Sans Extra Bold"/>
               </a:rPr>
-              <a:t>PRÁTICA 4 — LOGIN, E O TOKEN NA MÃO</a:t>
+              <a:t>PRÁTICA 4: LOGIN, E O TOKEN NA MÃO</a:t>
             </a:r>
           </a:p>
         </p:txBody>
@@ -17979,7 +17979,7 @@
                 <a:cs typeface="Open Sans Extra Bold"/>
                 <a:sym typeface="Open Sans Extra Bold"/>
               </a:rPr>
-              <a:t>PRÁTICA 5 — LOGOUT QUE REVOGA DE VERDADE</a:t>
+              <a:t>PRÁTICA 5: LOGOUT QUE REVOGA DE VERDADE</a:t>
             </a:r>
           </a:p>
         </p:txBody>
@@ -19861,7 +19861,7 @@
                 <a:cs typeface="Open Sans Extra Bold"/>
                 <a:sym typeface="Open Sans Extra Bold"/>
               </a:rPr>
-              <a:t>PRÁTICA 6 — RECUPERAÇÃO DE SENHA</a:t>
+              <a:t>PRÁTICA 6: RECUPERAÇÃO DE SENHA</a:t>
             </a:r>
           </a:p>
         </p:txBody>
@@ -21677,7 +21677,7 @@
                 <a:cs typeface="Open Sans Extra Bold"/>
                 <a:sym typeface="Open Sans Extra Bold"/>
               </a:rPr>
-              <a:t>PRÁTICA 7 — TESTES E QUALIDADE</a:t>
+              <a:t>PRÁTICA 7: TESTES E QUALIDADE</a:t>
             </a:r>
           </a:p>
         </p:txBody>
@@ -21976,7 +21976,7 @@
                 <a:cs typeface="Open Sans Extra Bold"/>
                 <a:sym typeface="Open Sans Extra Bold"/>
               </a:rPr>
-              <a:t>PRÁTICA 8 — AVANÇADO: QUEBRE A ASSINATURA</a:t>
+              <a:t>PRÁTICA 8: AVANÇADO: QUEBRE A ASSINATURA</a:t>
             </a:r>
           </a:p>
         </p:txBody>

--- a/slides/build/aula-03-autenticacao.pptx
+++ b/slides/build/aula-03-autenticacao.pptx
@@ -666,22 +666,17 @@
           <a:lstStyle/>
           <a:p>
             <a:r>
-              <a:t>~15 minutos.</a:t>
-            </a:r>
-          </a:p>
-          <a:p>
-            <a:r>
-              <a:t>Quebrar de propósito e ver o teste específico acusar é o que transforma</a:t>
-            </a:r>
-          </a:p>
-          <a:p>
-            <a:r>
-              <a:t>"teste é chato" em "teste é rede de segurança". Não pule.</a:t>
-            </a:r>
-          </a:p>
-          <a:p>
-            <a:r>
-              <a:t>git checkout . desfaz tudo o que não foi commitado, se alguém se perder.</a:t>
+              <a:t>Segundo dos quatro momentos de "enumeração" da aula. A essa altura</a:t>
+            </a:r>
+          </a:p>
+          <a:p>
+            <a:r>
+              <a:t>pergunte ANTES de virar o slide: "o e-mail não existe. O que</a:t>
+            </a:r>
+          </a:p>
+          <a:p>
+            <a:r>
+              <a:t>respondemos?" Eles começam a acertar sozinhos aqui.</a:t>
             </a:r>
           </a:p>
         </p:txBody>
@@ -751,6 +746,691 @@
           <a:lstStyle/>
           <a:p>
             <a:r>
+              <a:t>~20 minutos, o núcleo da aula.</a:t>
+            </a:r>
+          </a:p>
+          <a:p>
+            <a:r>
+              <a:t>Se $TOKEN sair vazio, mande rodar o curl -i sozinho e olhar se o</a:t>
+            </a:r>
+          </a:p>
+          <a:p>
+            <a:r>
+              <a:t>cabeçalho Authorization está lá.</a:t>
+            </a:r>
+          </a:p>
+          <a:p>
+            <a:r>
+              <a:t>No jwt.io ele vai dizer "invalid signature" — é esperado, ele não tem o</a:t>
+            </a:r>
+          </a:p>
+          <a:p>
+            <a:r>
+              <a:t>segredo. Eles só querem LER o payload, e ver que é público.</a:t>
+            </a:r>
+          </a:p>
+        </p:txBody>
+      </p:sp>
+      <p:sp>
+        <p:nvSpPr>
+          <p:cNvPr id="4" name="Slide Number Placeholder 3"/>
+          <p:cNvSpPr>
+            <a:spLocks noGrp="1"/>
+          </p:cNvSpPr>
+          <p:nvPr>
+            <p:ph type="sldNum" idx="5" sz="quarter"/>
+          </p:nvPr>
+        </p:nvSpPr>
+        <p:spPr/>
+      </p:sp>
+    </p:spTree>
+  </p:cSld>
+  <p:clrMapOvr>
+    <a:masterClrMapping/>
+  </p:clrMapOvr>
+</p:notes>
+</file>
+
+<file path=ppt/notesSlides/notesSlide12.xml><?xml version="1.0" encoding="utf-8"?>
+<p:notes xmlns:a="http://schemas.openxmlformats.org/drawingml/2006/main" xmlns:p="http://schemas.openxmlformats.org/presentationml/2006/main" xmlns:r="http://schemas.openxmlformats.org/officeDocument/2006/relationships">
+  <p:cSld>
+    <p:spTree>
+      <p:nvGrpSpPr>
+        <p:cNvPr id="1" name=""/>
+        <p:cNvGrpSpPr/>
+        <p:nvPr/>
+      </p:nvGrpSpPr>
+      <p:grpSpPr>
+        <a:xfrm>
+          <a:off x="0" y="0"/>
+          <a:ext cx="0" cy="0"/>
+          <a:chOff x="0" y="0"/>
+          <a:chExt cx="0" cy="0"/>
+        </a:xfrm>
+      </p:grpSpPr>
+      <p:sp>
+        <p:nvSpPr>
+          <p:cNvPr id="2" name="Slide Image Placeholder 1"/>
+          <p:cNvSpPr>
+            <a:spLocks noGrp="1"/>
+          </p:cNvSpPr>
+          <p:nvPr>
+            <p:ph type="sldImg" idx="2"/>
+          </p:nvPr>
+        </p:nvSpPr>
+        <p:spPr/>
+      </p:sp>
+      <p:sp>
+        <p:nvSpPr>
+          <p:cNvPr id="3" name="Notes Placeholder 2"/>
+          <p:cNvSpPr>
+            <a:spLocks noGrp="1"/>
+          </p:cNvSpPr>
+          <p:nvPr>
+            <p:ph type="body" idx="3" sz="quarter"/>
+          </p:nvPr>
+        </p:nvSpPr>
+        <p:spPr/>
+        <p:txBody>
+          <a:bodyPr/>
+          <a:lstStyle/>
+          <a:p>
+            <a:r>
+              <a:t>Conduza como problema, não como solução. Pergunte de verdade e espere:</a:t>
+            </a:r>
+          </a:p>
+          <a:p>
+            <a:r>
+              <a:t>"o token vale 24h e o servidor não guarda sessão. O que SAIR significa?"</a:t>
+            </a:r>
+          </a:p>
+          <a:p>
+            <a:r>
+              <a:t>Deixe alguém propor "apaga no cliente", aceite, e só então pergunte "e se</a:t>
+            </a:r>
+          </a:p>
+          <a:p>
+            <a:r>
+              <a:t>já copiaram o token?". A solução entra muito melhor depois da tentativa.</a:t>
+            </a:r>
+          </a:p>
+        </p:txBody>
+      </p:sp>
+      <p:sp>
+        <p:nvSpPr>
+          <p:cNvPr id="4" name="Slide Number Placeholder 3"/>
+          <p:cNvSpPr>
+            <a:spLocks noGrp="1"/>
+          </p:cNvSpPr>
+          <p:nvPr>
+            <p:ph type="sldNum" idx="5" sz="quarter"/>
+          </p:nvPr>
+        </p:nvSpPr>
+        <p:spPr/>
+      </p:sp>
+    </p:spTree>
+  </p:cSld>
+  <p:clrMapOvr>
+    <a:masterClrMapping/>
+  </p:clrMapOvr>
+</p:notes>
+</file>
+
+<file path=ppt/notesSlides/notesSlide13.xml><?xml version="1.0" encoding="utf-8"?>
+<p:notes xmlns:a="http://schemas.openxmlformats.org/drawingml/2006/main" xmlns:p="http://schemas.openxmlformats.org/presentationml/2006/main" xmlns:r="http://schemas.openxmlformats.org/officeDocument/2006/relationships">
+  <p:cSld>
+    <p:spTree>
+      <p:nvGrpSpPr>
+        <p:cNvPr id="1" name=""/>
+        <p:cNvGrpSpPr/>
+        <p:nvPr/>
+      </p:nvGrpSpPr>
+      <p:grpSpPr>
+        <a:xfrm>
+          <a:off x="0" y="0"/>
+          <a:ext cx="0" cy="0"/>
+          <a:chOff x="0" y="0"/>
+          <a:chExt cx="0" cy="0"/>
+        </a:xfrm>
+      </p:grpSpPr>
+      <p:sp>
+        <p:nvSpPr>
+          <p:cNvPr id="2" name="Slide Image Placeholder 1"/>
+          <p:cNvSpPr>
+            <a:spLocks noGrp="1"/>
+          </p:cNvSpPr>
+          <p:nvPr>
+            <p:ph type="sldImg" idx="2"/>
+          </p:nvPr>
+        </p:nvSpPr>
+        <p:spPr/>
+      </p:sp>
+      <p:sp>
+        <p:nvSpPr>
+          <p:cNvPr id="3" name="Notes Placeholder 2"/>
+          <p:cNvSpPr>
+            <a:spLocks noGrp="1"/>
+          </p:cNvSpPr>
+          <p:nvPr>
+            <p:ph type="body" idx="3" sz="quarter"/>
+          </p:nvPr>
+        </p:nvSpPr>
+        <p:spPr/>
+        <p:txBody>
+          <a:bodyPr/>
+          <a:lstStyle/>
+          <a:p>
+            <a:r>
+              <a:t>A sacada, e vale marcar: o TTL de cada entrada é exatamente o que faltava</a:t>
+            </a:r>
+          </a:p>
+          <a:p>
+            <a:r>
+              <a:t>para o token expirar. Depois disso ele já não vale por si, e guardar mais</a:t>
+            </a:r>
+          </a:p>
+          <a:p>
+            <a:r>
+              <a:t>seria lixo eterno.</a:t>
+            </a:r>
+          </a:p>
+          <a:p>
+            <a:r>
+              <a:t>Pergunta que aparece: "e se o cache cair?" Cai a revogação daquele token</a:t>
+            </a:r>
+          </a:p>
+          <a:p>
+            <a:r>
+              <a:t>até ele expirar. É o custo, e é aceitável para 24h.</a:t>
+            </a:r>
+          </a:p>
+        </p:txBody>
+      </p:sp>
+      <p:sp>
+        <p:nvSpPr>
+          <p:cNvPr id="4" name="Slide Number Placeholder 3"/>
+          <p:cNvSpPr>
+            <a:spLocks noGrp="1"/>
+          </p:cNvSpPr>
+          <p:nvPr>
+            <p:ph type="sldNum" idx="5" sz="quarter"/>
+          </p:nvPr>
+        </p:nvSpPr>
+        <p:spPr/>
+      </p:sp>
+    </p:spTree>
+  </p:cSld>
+  <p:clrMapOvr>
+    <a:masterClrMapping/>
+  </p:clrMapOvr>
+</p:notes>
+</file>
+
+<file path=ppt/notesSlides/notesSlide14.xml><?xml version="1.0" encoding="utf-8"?>
+<p:notes xmlns:a="http://schemas.openxmlformats.org/drawingml/2006/main" xmlns:p="http://schemas.openxmlformats.org/presentationml/2006/main" xmlns:r="http://schemas.openxmlformats.org/officeDocument/2006/relationships">
+  <p:cSld>
+    <p:spTree>
+      <p:nvGrpSpPr>
+        <p:cNvPr id="1" name=""/>
+        <p:cNvGrpSpPr/>
+        <p:nvPr/>
+      </p:nvGrpSpPr>
+      <p:grpSpPr>
+        <a:xfrm>
+          <a:off x="0" y="0"/>
+          <a:ext cx="0" cy="0"/>
+          <a:chOff x="0" y="0"/>
+          <a:chExt cx="0" cy="0"/>
+        </a:xfrm>
+      </p:grpSpPr>
+      <p:sp>
+        <p:nvSpPr>
+          <p:cNvPr id="2" name="Slide Image Placeholder 1"/>
+          <p:cNvSpPr>
+            <a:spLocks noGrp="1"/>
+          </p:cNvSpPr>
+          <p:nvPr>
+            <p:ph type="sldImg" idx="2"/>
+          </p:nvPr>
+        </p:nvSpPr>
+        <p:spPr/>
+      </p:sp>
+      <p:sp>
+        <p:nvSpPr>
+          <p:cNvPr id="3" name="Notes Placeholder 2"/>
+          <p:cNvSpPr>
+            <a:spLocks noGrp="1"/>
+          </p:cNvSpPr>
+          <p:nvPr>
+            <p:ph type="body" idx="3" sz="quarter"/>
+          </p:nvPr>
+        </p:nvSpPr>
+        <p:spPr/>
+        <p:txBody>
+          <a:bodyPr/>
+          <a:lstStyle/>
+          <a:p>
+            <a:r>
+              <a:t>~15 minutos. É A prática que mostra a diferença entre apagar no</a:t>
+            </a:r>
+          </a:p>
+          <a:p>
+            <a:r>
+              <a:t>cliente e revogar no servidor.</a:t>
+            </a:r>
+          </a:p>
+          <a:p>
+            <a:r>
+              <a:t>O avançado leva à pergunta boa: por que a entrada da denylist tem TTL,</a:t>
+            </a:r>
+          </a:p>
+          <a:p>
+            <a:r>
+              <a:t>e por que o TTL é exatamente o que restava do token? Porque depois do</a:t>
+            </a:r>
+          </a:p>
+          <a:p>
+            <a:r>
+              <a:t>exp o token já não vale por si — guardar mais seria lixo eterno.</a:t>
+            </a:r>
+          </a:p>
+        </p:txBody>
+      </p:sp>
+      <p:sp>
+        <p:nvSpPr>
+          <p:cNvPr id="4" name="Slide Number Placeholder 3"/>
+          <p:cNvSpPr>
+            <a:spLocks noGrp="1"/>
+          </p:cNvSpPr>
+          <p:nvPr>
+            <p:ph type="sldNum" idx="5" sz="quarter"/>
+          </p:nvPr>
+        </p:nvSpPr>
+        <p:spPr/>
+      </p:sp>
+    </p:spTree>
+  </p:cSld>
+  <p:clrMapOvr>
+    <a:masterClrMapping/>
+  </p:clrMapOvr>
+</p:notes>
+</file>
+
+<file path=ppt/notesSlides/notesSlide15.xml><?xml version="1.0" encoding="utf-8"?>
+<p:notes xmlns:a="http://schemas.openxmlformats.org/drawingml/2006/main" xmlns:p="http://schemas.openxmlformats.org/presentationml/2006/main" xmlns:r="http://schemas.openxmlformats.org/officeDocument/2006/relationships">
+  <p:cSld>
+    <p:spTree>
+      <p:nvGrpSpPr>
+        <p:cNvPr id="1" name=""/>
+        <p:cNvGrpSpPr/>
+        <p:nvPr/>
+      </p:nvGrpSpPr>
+      <p:grpSpPr>
+        <a:xfrm>
+          <a:off x="0" y="0"/>
+          <a:ext cx="0" cy="0"/>
+          <a:chOff x="0" y="0"/>
+          <a:chExt cx="0" cy="0"/>
+        </a:xfrm>
+      </p:grpSpPr>
+      <p:sp>
+        <p:nvSpPr>
+          <p:cNvPr id="2" name="Slide Image Placeholder 1"/>
+          <p:cNvSpPr>
+            <a:spLocks noGrp="1"/>
+          </p:cNvSpPr>
+          <p:nvPr>
+            <p:ph type="sldImg" idx="2"/>
+          </p:nvPr>
+        </p:nvSpPr>
+        <p:spPr/>
+      </p:sp>
+      <p:sp>
+        <p:nvSpPr>
+          <p:cNvPr id="3" name="Notes Placeholder 2"/>
+          <p:cNvSpPr>
+            <a:spLocks noGrp="1"/>
+          </p:cNvSpPr>
+          <p:nvPr>
+            <p:ph type="body" idx="3" sz="quarter"/>
+          </p:nvPr>
+        </p:nvSpPr>
+        <p:spPr/>
+        <p:txBody>
+          <a:bodyPr/>
+          <a:lstStyle/>
+          <a:p>
+            <a:r>
+              <a:t>Terceiro "enumeração". Faça ao vivo, lado a lado: um e-mail que existe e</a:t>
+            </a:r>
+          </a:p>
+          <a:p>
+            <a:r>
+              <a:t>um que não existe, e mostre as duas respostas iguais na tela. É bem mais</a:t>
+            </a:r>
+          </a:p>
+          <a:p>
+            <a:r>
+              <a:t>convincente que o slide.</a:t>
+            </a:r>
+          </a:p>
+        </p:txBody>
+      </p:sp>
+      <p:sp>
+        <p:nvSpPr>
+          <p:cNvPr id="4" name="Slide Number Placeholder 3"/>
+          <p:cNvSpPr>
+            <a:spLocks noGrp="1"/>
+          </p:cNvSpPr>
+          <p:nvPr>
+            <p:ph type="sldNum" idx="5" sz="quarter"/>
+          </p:nvPr>
+        </p:nvSpPr>
+        <p:spPr/>
+      </p:sp>
+    </p:spTree>
+  </p:cSld>
+  <p:clrMapOvr>
+    <a:masterClrMapping/>
+  </p:clrMapOvr>
+</p:notes>
+</file>
+
+<file path=ppt/notesSlides/notesSlide16.xml><?xml version="1.0" encoding="utf-8"?>
+<p:notes xmlns:a="http://schemas.openxmlformats.org/drawingml/2006/main" xmlns:p="http://schemas.openxmlformats.org/presentationml/2006/main" xmlns:r="http://schemas.openxmlformats.org/officeDocument/2006/relationships">
+  <p:cSld>
+    <p:spTree>
+      <p:nvGrpSpPr>
+        <p:cNvPr id="1" name=""/>
+        <p:cNvGrpSpPr/>
+        <p:nvPr/>
+      </p:nvGrpSpPr>
+      <p:grpSpPr>
+        <a:xfrm>
+          <a:off x="0" y="0"/>
+          <a:ext cx="0" cy="0"/>
+          <a:chOff x="0" y="0"/>
+          <a:chExt cx="0" cy="0"/>
+        </a:xfrm>
+      </p:grpSpPr>
+      <p:sp>
+        <p:nvSpPr>
+          <p:cNvPr id="2" name="Slide Image Placeholder 1"/>
+          <p:cNvSpPr>
+            <a:spLocks noGrp="1"/>
+          </p:cNvSpPr>
+          <p:nvPr>
+            <p:ph type="sldImg" idx="2"/>
+          </p:nvPr>
+        </p:nvSpPr>
+        <p:spPr/>
+      </p:sp>
+      <p:sp>
+        <p:nvSpPr>
+          <p:cNvPr id="3" name="Notes Placeholder 2"/>
+          <p:cNvSpPr>
+            <a:spLocks noGrp="1"/>
+          </p:cNvSpPr>
+          <p:nvPr>
+            <p:ph type="body" idx="3" sz="quarter"/>
+          </p:nvPr>
+        </p:nvSpPr>
+        <p:spPr/>
+        <p:txBody>
+          <a:bodyPr/>
+          <a:lstStyle/>
+          <a:p>
+            <a:r>
+              <a:t>~20 minutos, o fluxo mais completo do sistema.</a:t>
+            </a:r>
+          </a:p>
+          <a:p>
+            <a:r>
+              <a:t>O segundo confere é o mais importante da prática, e o mais fácil de</a:t>
+            </a:r>
+          </a:p>
+          <a:p>
+            <a:r>
+              <a:t>pular. Faça ao vivo, lado a lado: e-mail que existe e e-mail que não</a:t>
+            </a:r>
+          </a:p>
+          <a:p>
+            <a:r>
+              <a:t>existe, mesma resposta, byte por byte.</a:t>
+            </a:r>
+          </a:p>
+        </p:txBody>
+      </p:sp>
+      <p:sp>
+        <p:nvSpPr>
+          <p:cNvPr id="4" name="Slide Number Placeholder 3"/>
+          <p:cNvSpPr>
+            <a:spLocks noGrp="1"/>
+          </p:cNvSpPr>
+          <p:nvPr>
+            <p:ph type="sldNum" idx="5" sz="quarter"/>
+          </p:nvPr>
+        </p:nvSpPr>
+        <p:spPr/>
+      </p:sp>
+    </p:spTree>
+  </p:cSld>
+  <p:clrMapOvr>
+    <a:masterClrMapping/>
+  </p:clrMapOvr>
+</p:notes>
+</file>
+
+<file path=ppt/notesSlides/notesSlide17.xml><?xml version="1.0" encoding="utf-8"?>
+<p:notes xmlns:a="http://schemas.openxmlformats.org/drawingml/2006/main" xmlns:p="http://schemas.openxmlformats.org/presentationml/2006/main" xmlns:r="http://schemas.openxmlformats.org/officeDocument/2006/relationships">
+  <p:cSld>
+    <p:spTree>
+      <p:nvGrpSpPr>
+        <p:cNvPr id="1" name=""/>
+        <p:cNvGrpSpPr/>
+        <p:nvPr/>
+      </p:nvGrpSpPr>
+      <p:grpSpPr>
+        <a:xfrm>
+          <a:off x="0" y="0"/>
+          <a:ext cx="0" cy="0"/>
+          <a:chOff x="0" y="0"/>
+          <a:chExt cx="0" cy="0"/>
+        </a:xfrm>
+      </p:grpSpPr>
+      <p:sp>
+        <p:nvSpPr>
+          <p:cNvPr id="2" name="Slide Image Placeholder 1"/>
+          <p:cNvSpPr>
+            <a:spLocks noGrp="1"/>
+          </p:cNvSpPr>
+          <p:nvPr>
+            <p:ph type="sldImg" idx="2"/>
+          </p:nvPr>
+        </p:nvSpPr>
+        <p:spPr/>
+      </p:sp>
+      <p:sp>
+        <p:nvSpPr>
+          <p:cNvPr id="3" name="Notes Placeholder 2"/>
+          <p:cNvSpPr>
+            <a:spLocks noGrp="1"/>
+          </p:cNvSpPr>
+          <p:nvPr>
+            <p:ph type="body" idx="3" sz="quarter"/>
+          </p:nvPr>
+        </p:nvSpPr>
+        <p:spPr/>
+        <p:txBody>
+          <a:bodyPr/>
+          <a:lstStyle/>
+          <a:p>
+            <a:r>
+              <a:t>Erro comum de quem começa a testar: comparar o número (assert_equal 401)</a:t>
+            </a:r>
+          </a:p>
+          <a:p>
+            <a:r>
+              <a:t>em vez do símbolo. O símbolo sobrevive a refatoração e diz o que você</a:t>
+            </a:r>
+          </a:p>
+          <a:p>
+            <a:r>
+              <a:t>quis dizer.</a:t>
+            </a:r>
+          </a:p>
+        </p:txBody>
+      </p:sp>
+      <p:sp>
+        <p:nvSpPr>
+          <p:cNvPr id="4" name="Slide Number Placeholder 3"/>
+          <p:cNvSpPr>
+            <a:spLocks noGrp="1"/>
+          </p:cNvSpPr>
+          <p:nvPr>
+            <p:ph type="sldNum" idx="5" sz="quarter"/>
+          </p:nvPr>
+        </p:nvSpPr>
+        <p:spPr/>
+      </p:sp>
+    </p:spTree>
+  </p:cSld>
+  <p:clrMapOvr>
+    <a:masterClrMapping/>
+  </p:clrMapOvr>
+</p:notes>
+</file>
+
+<file path=ppt/notesSlides/notesSlide18.xml><?xml version="1.0" encoding="utf-8"?>
+<p:notes xmlns:a="http://schemas.openxmlformats.org/drawingml/2006/main" xmlns:p="http://schemas.openxmlformats.org/presentationml/2006/main" xmlns:r="http://schemas.openxmlformats.org/officeDocument/2006/relationships">
+  <p:cSld>
+    <p:spTree>
+      <p:nvGrpSpPr>
+        <p:cNvPr id="1" name=""/>
+        <p:cNvGrpSpPr/>
+        <p:nvPr/>
+      </p:nvGrpSpPr>
+      <p:grpSpPr>
+        <a:xfrm>
+          <a:off x="0" y="0"/>
+          <a:ext cx="0" cy="0"/>
+          <a:chOff x="0" y="0"/>
+          <a:chExt cx="0" cy="0"/>
+        </a:xfrm>
+      </p:grpSpPr>
+      <p:sp>
+        <p:nvSpPr>
+          <p:cNvPr id="2" name="Slide Image Placeholder 1"/>
+          <p:cNvSpPr>
+            <a:spLocks noGrp="1"/>
+          </p:cNvSpPr>
+          <p:nvPr>
+            <p:ph type="sldImg" idx="2"/>
+          </p:nvPr>
+        </p:nvSpPr>
+        <p:spPr/>
+      </p:sp>
+      <p:sp>
+        <p:nvSpPr>
+          <p:cNvPr id="3" name="Notes Placeholder 2"/>
+          <p:cNvSpPr>
+            <a:spLocks noGrp="1"/>
+          </p:cNvSpPr>
+          <p:nvPr>
+            <p:ph type="body" idx="3" sz="quarter"/>
+          </p:nvPr>
+        </p:nvSpPr>
+        <p:spPr/>
+        <p:txBody>
+          <a:bodyPr/>
+          <a:lstStyle/>
+          <a:p>
+            <a:r>
+              <a:t>~15 minutos.</a:t>
+            </a:r>
+          </a:p>
+          <a:p>
+            <a:r>
+              <a:t>Quebrar de propósito e ver o teste específico acusar é o que transforma</a:t>
+            </a:r>
+          </a:p>
+          <a:p>
+            <a:r>
+              <a:t>"teste é chato" em "teste é rede de segurança". Não pule.</a:t>
+            </a:r>
+          </a:p>
+          <a:p>
+            <a:r>
+              <a:t>git checkout . desfaz tudo o que não foi commitado, se alguém se perder.</a:t>
+            </a:r>
+          </a:p>
+        </p:txBody>
+      </p:sp>
+      <p:sp>
+        <p:nvSpPr>
+          <p:cNvPr id="4" name="Slide Number Placeholder 3"/>
+          <p:cNvSpPr>
+            <a:spLocks noGrp="1"/>
+          </p:cNvSpPr>
+          <p:nvPr>
+            <p:ph type="sldNum" idx="5" sz="quarter"/>
+          </p:nvPr>
+        </p:nvSpPr>
+        <p:spPr/>
+      </p:sp>
+    </p:spTree>
+  </p:cSld>
+  <p:clrMapOvr>
+    <a:masterClrMapping/>
+  </p:clrMapOvr>
+</p:notes>
+</file>
+
+<file path=ppt/notesSlides/notesSlide19.xml><?xml version="1.0" encoding="utf-8"?>
+<p:notes xmlns:a="http://schemas.openxmlformats.org/drawingml/2006/main" xmlns:p="http://schemas.openxmlformats.org/presentationml/2006/main" xmlns:r="http://schemas.openxmlformats.org/officeDocument/2006/relationships">
+  <p:cSld>
+    <p:spTree>
+      <p:nvGrpSpPr>
+        <p:cNvPr id="1" name=""/>
+        <p:cNvGrpSpPr/>
+        <p:nvPr/>
+      </p:nvGrpSpPr>
+      <p:grpSpPr>
+        <a:xfrm>
+          <a:off x="0" y="0"/>
+          <a:ext cx="0" cy="0"/>
+          <a:chOff x="0" y="0"/>
+          <a:chExt cx="0" cy="0"/>
+        </a:xfrm>
+      </p:grpSpPr>
+      <p:sp>
+        <p:nvSpPr>
+          <p:cNvPr id="2" name="Slide Image Placeholder 1"/>
+          <p:cNvSpPr>
+            <a:spLocks noGrp="1"/>
+          </p:cNvSpPr>
+          <p:nvPr>
+            <p:ph type="sldImg" idx="2"/>
+          </p:nvPr>
+        </p:nvSpPr>
+        <p:spPr/>
+      </p:sp>
+      <p:sp>
+        <p:nvSpPr>
+          <p:cNvPr id="3" name="Notes Placeholder 2"/>
+          <p:cNvSpPr>
+            <a:spLocks noGrp="1"/>
+          </p:cNvSpPr>
+          <p:nvPr>
+            <p:ph type="body" idx="3" sz="quarter"/>
+          </p:nvPr>
+        </p:nvSpPr>
+        <p:spPr/>
+        <p:txBody>
+          <a:bodyPr/>
+          <a:lstStyle/>
+          <a:p>
+            <a:r>
               <a:t>~15 minutos, se sobrou tempo. É o exercício que faz entender o que uma</a:t>
             </a:r>
           </a:p>
@@ -1236,27 +1916,22 @@
           <a:lstStyle/>
           <a:p>
             <a:r>
-              <a:t>~20 minutos, o núcleo da aula.</a:t>
-            </a:r>
-          </a:p>
-          <a:p>
-            <a:r>
-              <a:t>Se $TOKEN sair vazio, mande rodar o curl -i sozinho e olhar se o</a:t>
-            </a:r>
-          </a:p>
-          <a:p>
-            <a:r>
-              <a:t>cabeçalho Authorization está lá.</a:t>
-            </a:r>
-          </a:p>
-          <a:p>
-            <a:r>
-              <a:t>No jwt.io ele vai dizer "invalid signature" — é esperado, ele não tem o</a:t>
-            </a:r>
-          </a:p>
-          <a:p>
-            <a:r>
-              <a:t>segredo. Eles só querem LER o payload, e ver que é público.</a:t>
+              <a:t>DEMO. Cole um token em jwt.io e mostre o payload legível, ou rode no</a:t>
+            </a:r>
+          </a:p>
+          <a:p>
+            <a:r>
+              <a:t>console: Base64.decode64(token.split(".")[1]).</a:t>
+            </a:r>
+          </a:p>
+          <a:p>
+            <a:r>
+              <a:t>A frase: "está assinado, não está criptografado. Qualquer um lê. Então</a:t>
+            </a:r>
+          </a:p>
+          <a:p>
+            <a:r>
+              <a:t>nunca ponham aqui nada que não possa ser lido."</a:t>
             </a:r>
           </a:p>
         </p:txBody>
@@ -1326,27 +2001,22 @@
           <a:lstStyle/>
           <a:p>
             <a:r>
-              <a:t>~15 minutos. É A prática que mostra a diferença entre apagar no</a:t>
-            </a:r>
-          </a:p>
-          <a:p>
-            <a:r>
-              <a:t>cliente e revogar no servidor.</a:t>
-            </a:r>
-          </a:p>
-          <a:p>
-            <a:r>
-              <a:t>O avançado leva à pergunta boa: por que a entrada da denylist tem TTL,</a:t>
-            </a:r>
-          </a:p>
-          <a:p>
-            <a:r>
-              <a:t>e por que o TTL é exatamente o que restava do token? Porque depois do</a:t>
-            </a:r>
-          </a:p>
-          <a:p>
-            <a:r>
-              <a:t>exp o token já não vale por si — guardar mais seria lixo eterno.</a:t>
+              <a:t>Este slide é o que a Prática 8 transforma em experiência. Avise que eles</a:t>
+            </a:r>
+          </a:p>
+          <a:p>
+            <a:r>
+              <a:t>vão fazer isso na mão hoje: trocar o true por false e entrar como outra</a:t>
+            </a:r>
+          </a:p>
+          <a:p>
+            <a:r>
+              <a:t>pessoa, sem saber a senha dela.</a:t>
+            </a:r>
+          </a:p>
+          <a:p>
+            <a:r>
+              <a:t>Já foi CVE em várias bibliotecas de JWT, com exatamente este desenho.</a:t>
             </a:r>
           </a:p>
         </p:txBody>
@@ -1416,22 +2086,22 @@
           <a:lstStyle/>
           <a:p>
             <a:r>
-              <a:t>~20 minutos, o fluxo mais completo do sistema.</a:t>
-            </a:r>
-          </a:p>
-          <a:p>
-            <a:r>
-              <a:t>O segundo confere é o mais importante da prática, e o mais fácil de</a:t>
-            </a:r>
-          </a:p>
-          <a:p>
-            <a:r>
-              <a:t>pular. Faça ao vivo, lado a lado: e-mail que existe e e-mail que não</a:t>
-            </a:r>
-          </a:p>
-          <a:p>
-            <a:r>
-              <a:t>existe, mesma resposta, byte por byte.</a:t>
+              <a:t>Se o tempo apertar, é aqui que você corta (este e o CSRF). O material fica</a:t>
+            </a:r>
+          </a:p>
+          <a:p>
+            <a:r>
+              <a:t>na apostila e nenhuma prática depende deles.</a:t>
+            </a:r>
+          </a:p>
+          <a:p>
+            <a:r>
+              <a:t>Antes de cortar, deixe uma frase: "existe um jeito de roubar o token pelo</a:t>
+            </a:r>
+          </a:p>
+          <a:p>
+            <a:r>
+              <a:t>navegador, e é por isso que o cookie é httponly."</a:t>
             </a:r>
           </a:p>
         </p:txBody>

--- a/slides/build/aula-03-autenticacao.pptx
+++ b/slides/build/aula-03-autenticacao.pptx
@@ -1519,14 +1519,41 @@
               <a:t>~20 minutos: 5 de comando, 15 de leitura. A leitura é a parte que conta.</a:t>
             </a:r>
           </a:p>
-          <a:p>
-            <a:r>
-              <a:t>Se o Gemfile não for junto no rsync, dá uninitialized constant</a:t>
-            </a:r>
-          </a:p>
-          <a:p>
-            <a:r>
-              <a:t>Rack::Cors. É o erro número um deste bloco.</a:t>
+          <a:p/>
+          <a:p>
+            <a:r>
+              <a:t>ANTES DE MANDAR RODAR: pare e cobre o rm -rf db/migrate db/schema.rb.</a:t>
+            </a:r>
+          </a:p>
+          <a:p>
+            <a:r>
+              <a:t>As migrations que eles geraram na Aula 2 têm o horário deles; as do</a:t>
+            </a:r>
+          </a:p>
+          <a:p>
+            <a:r>
+              <a:t>gabarito têm outro. Sem apagar, ficam duas classes CreateUsers e o Rails</a:t>
+            </a:r>
+          </a:p>
+          <a:p>
+            <a:r>
+              <a:t>morre em QUALQUER comando, com "Multiple migrations have the name".</a:t>
+            </a:r>
+          </a:p>
+          <a:p>
+            <a:r>
+              <a:t>É o erro que trava a aula inteira no primeiro comando do dia.</a:t>
+            </a:r>
+          </a:p>
+          <a:p/>
+          <a:p>
+            <a:r>
+              <a:t>O segundo erro do bloco é o Gemfile não ir junto no rsync, que dá</a:t>
+            </a:r>
+          </a:p>
+          <a:p>
+            <a:r>
+              <a:t>uninitialized constant Rack::Cors.</a:t>
             </a:r>
           </a:p>
           <a:p>
@@ -7501,7 +7528,28 @@
                 <a:cs typeface="Open Sans Extra Bold"/>
                 <a:sym typeface="Open Sans Extra Bold"/>
               </a:rPr>
-              <a:t>rsync do gabarito aula-03, bundle install, db:migrate.</a:t>
+              <a:t>APAGUE db/migrate e db/schema.rb ANTES do rsync.</a:t>
+            </a:r>
+          </a:p>
+          <a:p>
+            <a:pPr algn="l" marL="2272757" indent="-757586" lvl="2">
+              <a:lnSpc>
+                <a:spcPts val="4573"/>
+              </a:lnSpc>
+              <a:buFont typeface="Arial"/>
+              <a:buChar char="◦"/>
+            </a:pPr>
+            <a:r>
+              <a:rPr lang="en-US" sz="2894">
+                <a:solidFill>
+                  <a:srgbClr val="000000"/>
+                </a:solidFill>
+                <a:latin typeface="Open Sans Extra Bold"/>
+                <a:ea typeface="Open Sans Extra Bold"/>
+                <a:cs typeface="Open Sans Extra Bold"/>
+                <a:sym typeface="Open Sans Extra Bold"/>
+              </a:rPr>
+              <a:t>senão ficam duas CreateUsers e o Rails para de funcionar</a:t>
             </a:r>
           </a:p>
           <a:p>
@@ -7522,7 +7570,7 @@
                 <a:cs typeface="Open Sans Extra Bold"/>
                 <a:sym typeface="Open Sans Extra Bold"/>
               </a:rPr>
-              <a:t>Confere: bin/rails test  -&gt;  71 verdes. NÃO siga sem isso.</a:t>
+              <a:t>rsync, bundle install, e db:drop db:create db:migrate.</a:t>
             </a:r>
           </a:p>
           <a:p>
@@ -7543,7 +7591,28 @@
                 <a:cs typeface="Open Sans Extra Bold"/>
                 <a:sym typeface="Open Sans Extra Bold"/>
               </a:rPr>
-              <a:t>Agora leia cinco arquivos, nesta ordem, abrindo no editor:</a:t>
+              <a:t>Confere: 71 testes verdes. NÃO siga sem isso.</a:t>
+            </a:r>
+          </a:p>
+          <a:p>
+            <a:pPr algn="l" marL="1136378" indent="-568189" lvl="1">
+              <a:lnSpc>
+                <a:spcPts val="4573"/>
+              </a:lnSpc>
+              <a:buFont typeface="Arial"/>
+              <a:buChar char="•"/>
+            </a:pPr>
+            <a:r>
+              <a:rPr lang="en-US" sz="2894">
+                <a:solidFill>
+                  <a:srgbClr val="000000"/>
+                </a:solidFill>
+                <a:latin typeface="Open Sans Extra Bold"/>
+                <a:ea typeface="Open Sans Extra Bold"/>
+                <a:cs typeface="Open Sans Extra Bold"/>
+                <a:sym typeface="Open Sans Extra Bold"/>
+              </a:rPr>
+              <a:t>Depois leia cinco arquivos: register, issue_token, authentication,</a:t>
             </a:r>
           </a:p>
           <a:p>
@@ -7564,49 +7633,7 @@
                 <a:cs typeface="Open Sans Extra Bold"/>
                 <a:sym typeface="Open Sans Extra Bold"/>
               </a:rPr>
-              <a:t>register.rb · issue_token.rb · authentication.rb</a:t>
-            </a:r>
-          </a:p>
-          <a:p>
-            <a:pPr algn="l" marL="2272757" indent="-757586" lvl="2">
-              <a:lnSpc>
-                <a:spcPts val="4573"/>
-              </a:lnSpc>
-              <a:buFont typeface="Arial"/>
-              <a:buChar char="◦"/>
-            </a:pPr>
-            <a:r>
-              <a:rPr lang="en-US" sz="2894">
-                <a:solidFill>
-                  <a:srgbClr val="000000"/>
-                </a:solidFill>
-                <a:latin typeface="Open Sans Extra Bold"/>
-                <a:ea typeface="Open Sans Extra Bold"/>
-                <a:cs typeface="Open Sans Extra Bold"/>
-                <a:sym typeface="Open Sans Extra Bold"/>
-              </a:rPr>
-              <a:t>token_denylist.rb · complete_password_reset.rb</a:t>
-            </a:r>
-          </a:p>
-          <a:p>
-            <a:pPr algn="l" marL="1136378" indent="-568189" lvl="1">
-              <a:lnSpc>
-                <a:spcPts val="4573"/>
-              </a:lnSpc>
-              <a:buFont typeface="Arial"/>
-              <a:buChar char="•"/>
-            </a:pPr>
-            <a:r>
-              <a:rPr lang="en-US" sz="2894">
-                <a:solidFill>
-                  <a:srgbClr val="000000"/>
-                </a:solidFill>
-                <a:latin typeface="Open Sans Extra Bold"/>
-                <a:ea typeface="Open Sans Extra Bold"/>
-                <a:cs typeface="Open Sans Extra Bold"/>
-                <a:sym typeface="Open Sans Extra Bold"/>
-              </a:rPr>
-              <a:t>Ache o Struct de retorno e os argumentos nomeados. Estão em todos.</a:t>
+              <a:t>token_denylist e complete_password_reset.</a:t>
             </a:r>
           </a:p>
           <a:p>

--- a/slides/build/aula-03-autenticacao.pptx
+++ b/slides/build/aula-03-autenticacao.pptx
@@ -7591,7 +7591,7 @@
                 <a:cs typeface="Open Sans Extra Bold"/>
                 <a:sym typeface="Open Sans Extra Bold"/>
               </a:rPr>
-              <a:t>Confere: 71 testes verdes. NÃO siga sem isso.</a:t>
+              <a:t>VOCÊ DEVE VER: 71 testes verdes. NÃO siga sem isso.</a:t>
             </a:r>
           </a:p>
           <a:p>
@@ -8893,13 +8893,13 @@
           <a:p>
             <a:pPr algn="l" marL="1136378" indent="-568189" lvl="1">
               <a:lnSpc>
-                <a:spcPts val="4989"/>
+                <a:spcPts val="4573"/>
               </a:lnSpc>
               <a:buFont typeface="Arial"/>
               <a:buChar char="•"/>
             </a:pPr>
             <a:r>
-              <a:rPr lang="en-US" sz="3157">
+              <a:rPr lang="en-US" sz="2894">
                 <a:solidFill>
                   <a:srgbClr val="000000"/>
                 </a:solidFill>
@@ -8908,19 +8908,19 @@
                 <a:cs typeface="Open Sans Extra Bold"/>
                 <a:sym typeface="Open Sans Extra Bold"/>
               </a:rPr>
-              <a:t>curl -i -X POST $API/registrations com o JSON completo.</a:t>
+              <a:t>No INSOMNIA: POST /api/v1/registrations, body JSON.</a:t>
             </a:r>
           </a:p>
           <a:p>
             <a:pPr algn="l" marL="1136378" indent="-568189" lvl="1">
               <a:lnSpc>
-                <a:spcPts val="4989"/>
+                <a:spcPts val="4573"/>
               </a:lnSpc>
               <a:buFont typeface="Arial"/>
               <a:buChar char="•"/>
             </a:pPr>
             <a:r>
-              <a:rPr lang="en-US" sz="3157">
+              <a:rPr lang="en-US" sz="2894">
                 <a:solidFill>
                   <a:srgbClr val="000000"/>
                 </a:solidFill>
@@ -8929,19 +8929,40 @@
                 <a:cs typeface="Open Sans Extra Bold"/>
                 <a:sym typeface="Open Sans Extra Bold"/>
               </a:rPr>
-              <a:t>Confere: 201, e o e-mail abriu no navegador. ANOTE o código.</a:t>
+              <a:t>VOCÊ DEVE VER: 201, e no corpo email_verified: false.</a:t>
+            </a:r>
+          </a:p>
+          <a:p>
+            <a:pPr algn="l" marL="2272757" indent="-757586" lvl="2">
+              <a:lnSpc>
+                <a:spcPts val="4573"/>
+              </a:lnSpc>
+              <a:buFont typeface="Arial"/>
+              <a:buChar char="◦"/>
+            </a:pPr>
+            <a:r>
+              <a:rPr lang="en-US" sz="2894">
+                <a:solidFill>
+                  <a:srgbClr val="000000"/>
+                </a:solidFill>
+                <a:latin typeface="Open Sans Extra Bold"/>
+                <a:ea typeface="Open Sans Extra Bold"/>
+                <a:cs typeface="Open Sans Extra Bold"/>
+                <a:sym typeface="Open Sans Extra Bold"/>
+              </a:rPr>
+              <a:t>e nenhum password nem digest: é o serializer decidindo</a:t>
             </a:r>
           </a:p>
           <a:p>
             <a:pPr algn="l" marL="1136378" indent="-568189" lvl="1">
               <a:lnSpc>
-                <a:spcPts val="4989"/>
+                <a:spcPts val="4573"/>
               </a:lnSpc>
               <a:buFont typeface="Arial"/>
               <a:buChar char="•"/>
             </a:pPr>
             <a:r>
-              <a:rPr lang="en-US" sz="3157">
+              <a:rPr lang="en-US" sz="2894">
                 <a:solidFill>
                   <a:srgbClr val="000000"/>
                 </a:solidFill>
@@ -8950,19 +8971,19 @@
                 <a:cs typeface="Open Sans Extra Bold"/>
                 <a:sym typeface="Open Sans Extra Bold"/>
               </a:rPr>
-              <a:t>Monte a coleção inteira no Insomnia: são 8 requisições.</a:t>
+              <a:t>O e-mail abriu no navegador. ANOTE o código de 6 dígitos.</a:t>
             </a:r>
           </a:p>
           <a:p>
             <a:pPr algn="l" marL="1136378" indent="-568189" lvl="1">
               <a:lnSpc>
-                <a:spcPts val="4989"/>
+                <a:spcPts val="4573"/>
               </a:lnSpc>
               <a:buFont typeface="Arial"/>
               <a:buChar char="•"/>
             </a:pPr>
             <a:r>
-              <a:rPr lang="en-US" sz="3157">
+              <a:rPr lang="en-US" sz="2894">
                 <a:solidFill>
                   <a:srgbClr val="000000"/>
                 </a:solidFill>
@@ -8971,19 +8992,19 @@
                 <a:cs typeface="Open Sans Extra Bold"/>
                 <a:sym typeface="Open Sans Extra Bold"/>
               </a:rPr>
-              <a:t>Avançado: cadastre o MESMO e-mail de novo. Que status, e que mensagem?</a:t>
+              <a:t>Monte as outras 7 requisições da coleção. Você usa todas hoje.</a:t>
             </a:r>
           </a:p>
           <a:p>
             <a:pPr algn="l" marL="1136378" indent="-568189" lvl="1">
               <a:lnSpc>
-                <a:spcPts val="4989"/>
+                <a:spcPts val="4573"/>
               </a:lnSpc>
               <a:buFont typeface="Arial"/>
               <a:buChar char="•"/>
             </a:pPr>
             <a:r>
-              <a:rPr lang="en-US" sz="3157">
+              <a:rPr lang="en-US" sz="2894">
                 <a:solidFill>
                   <a:srgbClr val="000000"/>
                 </a:solidFill>
@@ -8992,19 +9013,19 @@
                 <a:cs typeface="Open Sans Extra Bold"/>
                 <a:sym typeface="Open Sans Extra Bold"/>
               </a:rPr>
-              <a:t>A mensagem entrega ao atacante que aquele e-mail já existe?</a:t>
+              <a:t>Avançado: cadastre o MESMO e-mail. A mensagem entrega que ele existe?</a:t>
             </a:r>
           </a:p>
           <a:p>
             <a:pPr algn="l" marL="1136378" indent="-568189" lvl="1">
               <a:lnSpc>
-                <a:spcPts val="4989"/>
+                <a:spcPts val="4573"/>
               </a:lnSpc>
               <a:buFont typeface="Arial"/>
               <a:buChar char="•"/>
             </a:pPr>
             <a:r>
-              <a:rPr lang="en-US" sz="3157">
+              <a:rPr lang="en-US" sz="2894">
                 <a:solidFill>
                   <a:srgbClr val="000000"/>
                 </a:solidFill>
@@ -10308,7 +10329,7 @@
                 <a:cs typeface="Open Sans Extra Bold"/>
                 <a:sym typeface="Open Sans Extra Bold"/>
               </a:rPr>
-              <a:t>Tente logar ANTES de confirmar. Confere: 403 email_unverified.</a:t>
+              <a:t>POST /sessions ANTES de confirmar.</a:t>
             </a:r>
           </a:p>
           <a:p>
@@ -10329,7 +10350,7 @@
                 <a:cs typeface="Open Sans Extra Bold"/>
                 <a:sym typeface="Open Sans Extra Bold"/>
               </a:rPr>
-              <a:t>A senha está certa. O que falta é a conta estar ativa.</a:t>
+              <a:t>VOCÊ DEVE VER: 403, code: email_unverified.</a:t>
             </a:r>
           </a:p>
           <a:p>
@@ -10350,7 +10371,28 @@
                 <a:cs typeface="Open Sans Extra Bold"/>
                 <a:sym typeface="Open Sans Extra Bold"/>
               </a:rPr>
-              <a:t>POST /email_verifications/confirm com o código de 6 dígitos.</a:t>
+              <a:t>403 e não 401: a senha está CERTA, a conta é que não está ativa.</a:t>
+            </a:r>
+          </a:p>
+          <a:p>
+            <a:pPr algn="l" marL="1136378" indent="-568189" lvl="1">
+              <a:lnSpc>
+                <a:spcPts val="4989"/>
+              </a:lnSpc>
+              <a:buFont typeface="Arial"/>
+              <a:buChar char="•"/>
+            </a:pPr>
+            <a:r>
+              <a:rPr lang="en-US" sz="3157">
+                <a:solidFill>
+                  <a:srgbClr val="000000"/>
+                </a:solidFill>
+                <a:latin typeface="Open Sans Extra Bold"/>
+                <a:ea typeface="Open Sans Extra Bold"/>
+                <a:cs typeface="Open Sans Extra Bold"/>
+                <a:sym typeface="Open Sans Extra Bold"/>
+              </a:rPr>
+              <a:t>Depois POST /email_verifications/confirm com o código -&gt; 200.</a:t>
             </a:r>
           </a:p>
           <a:p>
@@ -15950,13 +15992,13 @@
           <a:p>
             <a:pPr algn="l" marL="1136378" indent="-568189" lvl="1">
               <a:lnSpc>
-                <a:spcPts val="4989"/>
+                <a:spcPts val="4573"/>
               </a:lnSpc>
               <a:buFont typeface="Arial"/>
               <a:buChar char="•"/>
             </a:pPr>
             <a:r>
-              <a:rPr lang="en-US" sz="3157">
+              <a:rPr lang="en-US" sz="2894">
                 <a:solidFill>
                   <a:srgbClr val="000000"/>
                 </a:solidFill>
@@ -15965,19 +16007,40 @@
                 <a:cs typeface="Open Sans Extra Bold"/>
                 <a:sym typeface="Open Sans Extra Bold"/>
               </a:rPr>
-              <a:t>Faça login e capture o token do cabeçalho Authorization.</a:t>
+              <a:t>POST /sessions -&gt; 200. O TOKEN VEM NO CABEÇALHO, não no corpo.</a:t>
+            </a:r>
+          </a:p>
+          <a:p>
+            <a:pPr algn="l" marL="2272757" indent="-757586" lvl="2">
+              <a:lnSpc>
+                <a:spcPts val="4573"/>
+              </a:lnSpc>
+              <a:buFont typeface="Arial"/>
+              <a:buChar char="◦"/>
+            </a:pPr>
+            <a:r>
+              <a:rPr lang="en-US" sz="2894">
+                <a:solidFill>
+                  <a:srgbClr val="000000"/>
+                </a:solidFill>
+                <a:latin typeface="Open Sans Extra Bold"/>
+                <a:ea typeface="Open Sans Extra Bold"/>
+                <a:cs typeface="Open Sans Extra Bold"/>
+                <a:sym typeface="Open Sans Extra Bold"/>
+              </a:rPr>
+              <a:t>aba Headers da resposta: Authorization: Bearer eyJ...</a:t>
             </a:r>
           </a:p>
           <a:p>
             <a:pPr algn="l" marL="1136378" indent="-568189" lvl="1">
               <a:lnSpc>
-                <a:spcPts val="4989"/>
+                <a:spcPts val="4573"/>
               </a:lnSpc>
               <a:buFont typeface="Arial"/>
               <a:buChar char="•"/>
             </a:pPr>
             <a:r>
-              <a:rPr lang="en-US" sz="3157">
+              <a:rPr lang="en-US" sz="2894">
                 <a:solidFill>
                   <a:srgbClr val="000000"/>
                 </a:solidFill>
@@ -15986,19 +16049,19 @@
                 <a:cs typeface="Open Sans Extra Bold"/>
                 <a:sym typeface="Open Sans Extra Bold"/>
               </a:rPr>
-              <a:t>curl $API/me -H "Authorization: Bearer $TOKEN"  -&gt;  200</a:t>
+              <a:t>Cole no header de GET /me  -&gt;  VOCÊ DEVE VER: 200 com os seus dados.</a:t>
             </a:r>
           </a:p>
           <a:p>
             <a:pPr algn="l" marL="1136378" indent="-568189" lvl="1">
               <a:lnSpc>
-                <a:spcPts val="4989"/>
+                <a:spcPts val="4573"/>
               </a:lnSpc>
               <a:buFont typeface="Arial"/>
               <a:buChar char="•"/>
             </a:pPr>
             <a:r>
-              <a:rPr lang="en-US" sz="3157">
+              <a:rPr lang="en-US" sz="2894">
                 <a:solidFill>
                   <a:srgbClr val="000000"/>
                 </a:solidFill>
@@ -16013,13 +16076,13 @@
           <a:p>
             <a:pPr algn="l" marL="1136378" indent="-568189" lvl="1">
               <a:lnSpc>
-                <a:spcPts val="4989"/>
+                <a:spcPts val="4573"/>
               </a:lnSpc>
               <a:buFont typeface="Arial"/>
               <a:buChar char="•"/>
             </a:pPr>
             <a:r>
-              <a:rPr lang="en-US" sz="3157">
+              <a:rPr lang="en-US" sz="2894">
                 <a:solidFill>
                   <a:srgbClr val="000000"/>
                 </a:solidFill>
@@ -16028,19 +16091,19 @@
                 <a:cs typeface="Open Sans Extra Bold"/>
                 <a:sym typeface="Open Sans Extra Bold"/>
               </a:rPr>
-              <a:t>Cole o token em jwt.io. Ache o sub, o jti, o ver e o exp.</a:t>
+              <a:t>Cole o token em jwt.io: ache sub, jti, ver e exp.</a:t>
             </a:r>
           </a:p>
           <a:p>
             <a:pPr algn="l" marL="1136378" indent="-568189" lvl="1">
               <a:lnSpc>
-                <a:spcPts val="4989"/>
+                <a:spcPts val="4573"/>
               </a:lnSpc>
               <a:buFont typeface="Arial"/>
               <a:buChar char="•"/>
             </a:pPr>
             <a:r>
-              <a:rPr lang="en-US" sz="3157">
+              <a:rPr lang="en-US" sz="2894">
                 <a:solidFill>
                   <a:srgbClr val="000000"/>
                 </a:solidFill>
@@ -16049,19 +16112,19 @@
                 <a:cs typeface="Open Sans Extra Bold"/>
                 <a:sym typeface="Open Sans Extra Bold"/>
               </a:rPr>
-              <a:t>Avançado: troque UM caractere do token e chame /me. Que status?</a:t>
+              <a:t>Avançado: acrescente um caractere no token e chame /me  -&gt;  401.</a:t>
             </a:r>
           </a:p>
           <a:p>
             <a:pPr algn="l" marL="1136378" indent="-568189" lvl="1">
               <a:lnSpc>
-                <a:spcPts val="4989"/>
+                <a:spcPts val="4573"/>
               </a:lnSpc>
               <a:buFont typeface="Arial"/>
               <a:buChar char="•"/>
             </a:pPr>
             <a:r>
-              <a:rPr lang="en-US" sz="3157">
+              <a:rPr lang="en-US" sz="2894">
                 <a:solidFill>
                   <a:srgbClr val="000000"/>
                 </a:solidFill>
@@ -18704,13 +18767,13 @@
           <a:p>
             <a:pPr algn="l" marL="1136378" indent="-568189" lvl="1">
               <a:lnSpc>
-                <a:spcPts val="4989"/>
+                <a:spcPts val="4573"/>
               </a:lnSpc>
               <a:buFont typeface="Arial"/>
               <a:buChar char="•"/>
             </a:pPr>
             <a:r>
-              <a:rPr lang="en-US" sz="3157">
+              <a:rPr lang="en-US" sz="2894">
                 <a:solidFill>
                   <a:srgbClr val="000000"/>
                 </a:solidFill>
@@ -18719,19 +18782,19 @@
                 <a:cs typeface="Open Sans Extra Bold"/>
                 <a:sym typeface="Open Sans Extra Bold"/>
               </a:rPr>
-              <a:t>DELETE /sessions com o token.</a:t>
+              <a:t>Antes de rodar, APOSTE: o /me vai dar 200 ou 401?</a:t>
             </a:r>
           </a:p>
           <a:p>
             <a:pPr algn="l" marL="1136378" indent="-568189" lvl="1">
               <a:lnSpc>
-                <a:spcPts val="4989"/>
+                <a:spcPts val="4573"/>
               </a:lnSpc>
               <a:buFont typeface="Arial"/>
               <a:buChar char="•"/>
             </a:pPr>
             <a:r>
-              <a:rPr lang="en-US" sz="3157">
+              <a:rPr lang="en-US" sz="2894">
                 <a:solidFill>
                   <a:srgbClr val="000000"/>
                 </a:solidFill>
@@ -18740,19 +18803,19 @@
                 <a:cs typeface="Open Sans Extra Bold"/>
                 <a:sym typeface="Open Sans Extra Bold"/>
               </a:rPr>
-              <a:t>Depois: curl -i $API/me com o MESMO token.</a:t>
+              <a:t>DELETE /sessions com o token  -&gt;  200.</a:t>
             </a:r>
           </a:p>
           <a:p>
             <a:pPr algn="l" marL="1136378" indent="-568189" lvl="1">
               <a:lnSpc>
-                <a:spcPts val="4989"/>
+                <a:spcPts val="4573"/>
               </a:lnSpc>
               <a:buFont typeface="Arial"/>
               <a:buChar char="•"/>
             </a:pPr>
             <a:r>
-              <a:rPr lang="en-US" sz="3157">
+              <a:rPr lang="en-US" sz="2894">
                 <a:solidFill>
                   <a:srgbClr val="000000"/>
                 </a:solidFill>
@@ -18761,19 +18824,19 @@
                 <a:cs typeface="Open Sans Extra Bold"/>
                 <a:sym typeface="Open Sans Extra Bold"/>
               </a:rPr>
-              <a:t>Confere: 401. O token ainda é válido e ainda não expirou.</a:t>
+              <a:t>GET /me com o MESMO token  -&gt;  VOCÊ DEVE VER: 401.</a:t>
             </a:r>
           </a:p>
           <a:p>
             <a:pPr algn="l" marL="1136378" indent="-568189" lvl="1">
               <a:lnSpc>
-                <a:spcPts val="4989"/>
+                <a:spcPts val="4573"/>
               </a:lnSpc>
               <a:buFont typeface="Arial"/>
               <a:buChar char="•"/>
             </a:pPr>
             <a:r>
-              <a:rPr lang="en-US" sz="3157">
+              <a:rPr lang="en-US" sz="2894">
                 <a:solidFill>
                   <a:srgbClr val="000000"/>
                 </a:solidFill>
@@ -18782,19 +18845,19 @@
                 <a:cs typeface="Open Sans Extra Bold"/>
                 <a:sym typeface="Open Sans Extra Bold"/>
               </a:rPr>
-              <a:t>Sem a denylist, isso responderia 200 até o exp chegar.</a:t>
+              <a:t>A assinatura ainda bate e o exp ainda está no futuro.</a:t>
             </a:r>
           </a:p>
           <a:p>
             <a:pPr algn="l" marL="1136378" indent="-568189" lvl="1">
               <a:lnSpc>
-                <a:spcPts val="4989"/>
+                <a:spcPts val="4573"/>
               </a:lnSpc>
               <a:buFont typeface="Arial"/>
               <a:buChar char="•"/>
             </a:pPr>
             <a:r>
-              <a:rPr lang="en-US" sz="3157">
+              <a:rPr lang="en-US" sz="2894">
                 <a:solidFill>
                   <a:srgbClr val="000000"/>
                 </a:solidFill>
@@ -18803,19 +18866,40 @@
                 <a:cs typeface="Open Sans Extra Bold"/>
                 <a:sym typeface="Open Sans Extra Bold"/>
               </a:rPr>
-              <a:t>Avançado: Rails.cache.read("denylist:&lt;o-seu-jti&gt;") no console.</a:t>
+              <a:t>O servidor DECIDIU não aceitar: o jti está na denylist.</a:t>
             </a:r>
           </a:p>
           <a:p>
             <a:pPr algn="l" marL="1136378" indent="-568189" lvl="1">
               <a:lnSpc>
-                <a:spcPts val="4989"/>
+                <a:spcPts val="4573"/>
               </a:lnSpc>
               <a:buFont typeface="Arial"/>
               <a:buChar char="•"/>
             </a:pPr>
             <a:r>
-              <a:rPr lang="en-US" sz="3157">
+              <a:rPr lang="en-US" sz="2894">
+                <a:solidFill>
+                  <a:srgbClr val="000000"/>
+                </a:solidFill>
+                <a:latin typeface="Open Sans Extra Bold"/>
+                <a:ea typeface="Open Sans Extra Bold"/>
+                <a:cs typeface="Open Sans Extra Bold"/>
+                <a:sym typeface="Open Sans Extra Bold"/>
+              </a:rPr>
+              <a:t>Avançado: Rails.cache.read("denylist:&lt;o-seu-jti&gt;") no console.</a:t>
+            </a:r>
+          </a:p>
+          <a:p>
+            <a:pPr algn="l" marL="1136378" indent="-568189" lvl="1">
+              <a:lnSpc>
+                <a:spcPts val="4573"/>
+              </a:lnSpc>
+              <a:buFont typeface="Arial"/>
+              <a:buChar char="•"/>
+            </a:pPr>
+            <a:r>
+              <a:rPr lang="en-US" sz="2894">
                 <a:solidFill>
                   <a:srgbClr val="000000"/>
                 </a:solidFill>
@@ -20601,7 +20685,7 @@
                 <a:cs typeface="Open Sans Extra Bold"/>
                 <a:sym typeface="Open Sans Extra Bold"/>
               </a:rPr>
-              <a:t>Faça login, guarde o token. Peça a recuperação e confirme a nova senha.</a:t>
+              <a:t>Login, guarde o token. Peça a recuperação, troque a senha.</a:t>
             </a:r>
           </a:p>
           <a:p>
@@ -20622,7 +20706,7 @@
                 <a:cs typeface="Open Sans Extra Bold"/>
                 <a:sym typeface="Open Sans Extra Bold"/>
               </a:rPr>
-              <a:t>Depois chame /me com o token ANTIGO.</a:t>
+              <a:t>Chame /me com o token ANTIGO  -&gt;  VOCÊ DEVE VER: 401.</a:t>
             </a:r>
           </a:p>
           <a:p>
@@ -20643,7 +20727,28 @@
                 <a:cs typeface="Open Sans Extra Bold"/>
                 <a:sym typeface="Open Sans Extra Bold"/>
               </a:rPr>
-              <a:t>Confere: 401. Trocar a senha derrubou todas as sessões abertas.</a:t>
+              <a:t>Trocar a senha derrubou TODAS as sessões, em todos os aparelhos.</a:t>
+            </a:r>
+          </a:p>
+          <a:p>
+            <a:pPr algn="l" marL="2272757" indent="-757586" lvl="2">
+              <a:lnSpc>
+                <a:spcPts val="4573"/>
+              </a:lnSpc>
+              <a:buFont typeface="Arial"/>
+              <a:buChar char="◦"/>
+            </a:pPr>
+            <a:r>
+              <a:rPr lang="en-US" sz="2894">
+                <a:solidFill>
+                  <a:srgbClr val="000000"/>
+                </a:solidFill>
+                <a:latin typeface="Open Sans Extra Bold"/>
+                <a:ea typeface="Open Sans Extra Bold"/>
+                <a:cs typeface="Open Sans Extra Bold"/>
+                <a:sym typeface="Open Sans Extra Bold"/>
+              </a:rPr>
+              <a:t>é o token_version subindo</a:t>
             </a:r>
           </a:p>
           <a:p>
@@ -20664,7 +20769,7 @@
                 <a:cs typeface="Open Sans Extra Bold"/>
                 <a:sym typeface="Open Sans Extra Bold"/>
               </a:rPr>
-              <a:t>É o token_version subindo. Quem roubou o seu token acabou de perdê-lo.</a:t>
+              <a:t>Agora peça recuperação para um e-mail que NÃO existe.</a:t>
             </a:r>
           </a:p>
           <a:p>
@@ -20685,28 +20790,7 @@
                 <a:cs typeface="Open Sans Extra Bold"/>
                 <a:sym typeface="Open Sans Extra Bold"/>
               </a:rPr>
-              <a:t>Confere também: peça recuperação para um e-mail que NÃO existe.</a:t>
-            </a:r>
-          </a:p>
-          <a:p>
-            <a:pPr algn="l" marL="1136378" indent="-568189" lvl="1">
-              <a:lnSpc>
-                <a:spcPts val="4573"/>
-              </a:lnSpc>
-              <a:buFont typeface="Arial"/>
-              <a:buChar char="•"/>
-            </a:pPr>
-            <a:r>
-              <a:rPr lang="en-US" sz="2894">
-                <a:solidFill>
-                  <a:srgbClr val="000000"/>
-                </a:solidFill>
-                <a:latin typeface="Open Sans Extra Bold"/>
-                <a:ea typeface="Open Sans Extra Bold"/>
-                <a:cs typeface="Open Sans Extra Bold"/>
-                <a:sym typeface="Open Sans Extra Bold"/>
-              </a:rPr>
-              <a:t>A resposta é idêntica. Isso é resistência a enumeração.</a:t>
+              <a:t>VOCÊ DEVE VER: a MESMA resposta. Ponha as duas lado a lado.</a:t>
             </a:r>
           </a:p>
           <a:p>
@@ -22402,13 +22486,13 @@
           <a:p>
             <a:pPr algn="l" marL="1136378" indent="-568189" lvl="1">
               <a:lnSpc>
-                <a:spcPts val="4989"/>
+                <a:spcPts val="4573"/>
               </a:lnSpc>
               <a:buFont typeface="Arial"/>
               <a:buChar char="•"/>
             </a:pPr>
             <a:r>
-              <a:rPr lang="en-US" sz="3157">
+              <a:rPr lang="en-US" sz="2894">
                 <a:solidFill>
                   <a:srgbClr val="000000"/>
                 </a:solidFill>
@@ -22423,13 +22507,13 @@
           <a:p>
             <a:pPr algn="l" marL="1136378" indent="-568189" lvl="1">
               <a:lnSpc>
-                <a:spcPts val="4989"/>
+                <a:spcPts val="4573"/>
               </a:lnSpc>
               <a:buFont typeface="Arial"/>
               <a:buChar char="•"/>
             </a:pPr>
             <a:r>
-              <a:rPr lang="en-US" sz="3157">
+              <a:rPr lang="en-US" sz="2894">
                 <a:solidFill>
                   <a:srgbClr val="000000"/>
                 </a:solidFill>
@@ -22438,19 +22522,19 @@
                 <a:cs typeface="Open Sans Extra Bold"/>
                 <a:sym typeface="Open Sans Extra Bold"/>
               </a:rPr>
-              <a:t>Agora QUEBRE: comente a linha da denylist no authentication.rb.</a:t>
+              <a:t>VOCÊ DEVE VER: 71 verdes, 0 ofensas, No warnings found.</a:t>
             </a:r>
           </a:p>
           <a:p>
             <a:pPr algn="l" marL="1136378" indent="-568189" lvl="1">
               <a:lnSpc>
-                <a:spcPts val="4989"/>
+                <a:spcPts val="4573"/>
               </a:lnSpc>
               <a:buFont typeface="Arial"/>
               <a:buChar char="•"/>
             </a:pPr>
             <a:r>
-              <a:rPr lang="en-US" sz="3157">
+              <a:rPr lang="en-US" sz="2894">
                 <a:solidFill>
                   <a:srgbClr val="000000"/>
                 </a:solidFill>
@@ -22459,19 +22543,19 @@
                 <a:cs typeface="Open Sans Extra Bold"/>
                 <a:sym typeface="Open Sans Extra Bold"/>
               </a:rPr>
-              <a:t>Rode os testes e veja QUAL fica vermelho.</a:t>
+              <a:t>Agora QUEBRE: comente a linha da denylist no authentication.rb.</a:t>
             </a:r>
           </a:p>
           <a:p>
             <a:pPr algn="l" marL="1136378" indent="-568189" lvl="1">
               <a:lnSpc>
-                <a:spcPts val="4989"/>
+                <a:spcPts val="4573"/>
               </a:lnSpc>
               <a:buFont typeface="Arial"/>
               <a:buChar char="•"/>
             </a:pPr>
             <a:r>
-              <a:rPr lang="en-US" sz="3157">
+              <a:rPr lang="en-US" sz="2894">
                 <a:solidFill>
                   <a:srgbClr val="000000"/>
                 </a:solidFill>
@@ -22480,19 +22564,19 @@
                 <a:cs typeface="Open Sans Extra Bold"/>
                 <a:sym typeface="Open Sans Extra Bold"/>
               </a:rPr>
-              <a:t>Era ele que estava te protegendo. Depois desfaça.</a:t>
+              <a:t>Rode os testes e veja QUAL fica vermelho.</a:t>
             </a:r>
           </a:p>
           <a:p>
             <a:pPr algn="l" marL="1136378" indent="-568189" lvl="1">
               <a:lnSpc>
-                <a:spcPts val="4989"/>
+                <a:spcPts val="4573"/>
               </a:lnSpc>
               <a:buFont typeface="Arial"/>
               <a:buChar char="•"/>
             </a:pPr>
             <a:r>
-              <a:rPr lang="en-US" sz="3157">
+              <a:rPr lang="en-US" sz="2894">
                 <a:solidFill>
                   <a:srgbClr val="000000"/>
                 </a:solidFill>
@@ -22501,19 +22585,40 @@
                 <a:cs typeface="Open Sans Extra Bold"/>
                 <a:sym typeface="Open Sans Extra Bold"/>
               </a:rPr>
-              <a:t>git commit e push.</a:t>
+              <a:t>Era ele que estava te protegendo. Depois desfaça.</a:t>
             </a:r>
           </a:p>
           <a:p>
             <a:pPr algn="l" marL="1136378" indent="-568189" lvl="1">
               <a:lnSpc>
-                <a:spcPts val="4989"/>
+                <a:spcPts val="4573"/>
               </a:lnSpc>
               <a:buFont typeface="Arial"/>
               <a:buChar char="•"/>
             </a:pPr>
             <a:r>
-              <a:rPr lang="en-US" sz="3157">
+              <a:rPr lang="en-US" sz="2894">
+                <a:solidFill>
+                  <a:srgbClr val="000000"/>
+                </a:solidFill>
+                <a:latin typeface="Open Sans Extra Bold"/>
+                <a:ea typeface="Open Sans Extra Bold"/>
+                <a:cs typeface="Open Sans Extra Bold"/>
+                <a:sym typeface="Open Sans Extra Bold"/>
+              </a:rPr>
+              <a:t>git commit e push.</a:t>
+            </a:r>
+          </a:p>
+          <a:p>
+            <a:pPr algn="l" marL="1136378" indent="-568189" lvl="1">
+              <a:lnSpc>
+                <a:spcPts val="4573"/>
+              </a:lnSpc>
+              <a:buFont typeface="Arial"/>
+              <a:buChar char="•"/>
+            </a:pPr>
+            <a:r>
+              <a:rPr lang="en-US" sz="2894">
                 <a:solidFill>
                   <a:srgbClr val="000000"/>
                 </a:solidFill>
@@ -22758,7 +22863,7 @@
                 <a:cs typeface="Open Sans Extra Bold"/>
                 <a:sym typeface="Open Sans Extra Bold"/>
               </a:rPr>
-              <a:t>Chame /me com ele. Confere: 200.</a:t>
+              <a:t>Chame /me com ele. VOCÊ DEVE VER: 200.</a:t>
             </a:r>
           </a:p>
           <a:p>

--- a/slides/build/aula-03-autenticacao.pptx
+++ b/slides/build/aula-03-autenticacao.pptx
@@ -16028,7 +16028,7 @@
                 <a:cs typeface="Open Sans Extra Bold"/>
                 <a:sym typeface="Open Sans Extra Bold"/>
               </a:rPr>
-              <a:t>aba Headers da resposta: Authorization: Bearer eyJ...</a:t>
+              <a:t>aba Headers: Authorization: Bearer eyJ...</a:t>
             </a:r>
           </a:p>
           <a:p>
@@ -16049,7 +16049,7 @@
                 <a:cs typeface="Open Sans Extra Bold"/>
                 <a:sym typeface="Open Sans Extra Bold"/>
               </a:rPr>
-              <a:t>Cole no header de GET /me  -&gt;  VOCÊ DEVE VER: 200 com os seus dados.</a:t>
+              <a:t>Cole no header de GET /me  -&gt;  VOCÊ DEVE VER: 200, com os seus dados.</a:t>
             </a:r>
           </a:p>
           <a:p>
@@ -16112,7 +16112,7 @@
                 <a:cs typeface="Open Sans Extra Bold"/>
                 <a:sym typeface="Open Sans Extra Bold"/>
               </a:rPr>
-              <a:t>Avançado: acrescente um caractere no token e chame /me  -&gt;  401.</a:t>
+              <a:t>Avançado: cronometre o login com e-mail que existe e que não existe.</a:t>
             </a:r>
           </a:p>
           <a:p>
